--- a/docs/pptx/carbo/ritu-carbo-adjcif-grade3.pptx
+++ b/docs/pptx/carbo/ritu-carbo-adjcif-grade3.pptx
@@ -2271,7 +2271,7 @@
           </p:nvSpPr>
           <p:spPr>
             <a:xfrm>
-              <a:off x="910695" y="5263795"/>
+              <a:off x="910695" y="5268902"/>
               <a:ext cx="7706515" cy="0"/>
             </a:xfrm>
             <a:custGeom>
@@ -2314,7 +2314,7 @@
           </p:nvSpPr>
           <p:spPr>
             <a:xfrm>
-              <a:off x="910695" y="4630542"/>
+              <a:off x="910695" y="4645862"/>
               <a:ext cx="7706515" cy="0"/>
             </a:xfrm>
             <a:custGeom>
@@ -2357,7 +2357,7 @@
           </p:nvSpPr>
           <p:spPr>
             <a:xfrm>
-              <a:off x="910695" y="3997290"/>
+              <a:off x="910695" y="4022822"/>
               <a:ext cx="7706515" cy="0"/>
             </a:xfrm>
             <a:custGeom>
@@ -2400,7 +2400,7 @@
           </p:nvSpPr>
           <p:spPr>
             <a:xfrm>
-              <a:off x="910695" y="3364037"/>
+              <a:off x="910695" y="3399783"/>
               <a:ext cx="7706515" cy="0"/>
             </a:xfrm>
             <a:custGeom>
@@ -2443,7 +2443,7 @@
           </p:nvSpPr>
           <p:spPr>
             <a:xfrm>
-              <a:off x="910695" y="2730784"/>
+              <a:off x="910695" y="2776743"/>
               <a:ext cx="7706515" cy="0"/>
             </a:xfrm>
             <a:custGeom>
@@ -2701,7 +2701,7 @@
           </p:nvSpPr>
           <p:spPr>
             <a:xfrm>
-              <a:off x="910695" y="4947169"/>
+              <a:off x="910695" y="4957382"/>
               <a:ext cx="7706515" cy="0"/>
             </a:xfrm>
             <a:custGeom>
@@ -2744,7 +2744,7 @@
           </p:nvSpPr>
           <p:spPr>
             <a:xfrm>
-              <a:off x="910695" y="4313916"/>
+              <a:off x="910695" y="4334342"/>
               <a:ext cx="7706515" cy="0"/>
             </a:xfrm>
             <a:custGeom>
@@ -2787,7 +2787,7 @@
           </p:nvSpPr>
           <p:spPr>
             <a:xfrm>
-              <a:off x="910695" y="3680663"/>
+              <a:off x="910695" y="3711302"/>
               <a:ext cx="7706515" cy="0"/>
             </a:xfrm>
             <a:custGeom>
@@ -2830,7 +2830,7 @@
           </p:nvSpPr>
           <p:spPr>
             <a:xfrm>
-              <a:off x="910695" y="3047410"/>
+              <a:off x="910695" y="3088263"/>
               <a:ext cx="7706515" cy="0"/>
             </a:xfrm>
             <a:custGeom>
@@ -3002,108 +3002,108 @@
           </p:nvSpPr>
           <p:spPr>
             <a:xfrm>
-              <a:off x="1260991" y="5317520"/>
-              <a:ext cx="7005923" cy="249187"/>
+              <a:off x="1260991" y="5321479"/>
+              <a:ext cx="7005923" cy="245347"/>
             </a:xfrm>
             <a:custGeom>
               <a:avLst/>
               <a:pathLst>
-                <a:path w="7005923" h="249187">
+                <a:path w="7005923" h="245347">
                   <a:moveTo>
-                    <a:pt x="0" y="249187"/>
+                    <a:pt x="0" y="245347"/>
                   </a:moveTo>
                   <a:lnTo>
-                    <a:pt x="93412" y="249187"/>
-                  </a:lnTo>
-                  <a:lnTo>
-                    <a:pt x="93412" y="236268"/>
-                  </a:lnTo>
-                  <a:lnTo>
-                    <a:pt x="186824" y="236268"/>
-                  </a:lnTo>
-                  <a:lnTo>
-                    <a:pt x="186824" y="224536"/>
-                  </a:lnTo>
-                  <a:lnTo>
-                    <a:pt x="373649" y="224536"/>
-                  </a:lnTo>
-                  <a:lnTo>
-                    <a:pt x="373649" y="210562"/>
-                  </a:lnTo>
-                  <a:lnTo>
-                    <a:pt x="1494596" y="210562"/>
-                  </a:lnTo>
-                  <a:lnTo>
-                    <a:pt x="1494596" y="197695"/>
-                  </a:lnTo>
-                  <a:lnTo>
-                    <a:pt x="1588009" y="197695"/>
-                  </a:lnTo>
-                  <a:lnTo>
-                    <a:pt x="1588009" y="185155"/>
-                  </a:lnTo>
-                  <a:lnTo>
-                    <a:pt x="1681421" y="185155"/>
-                  </a:lnTo>
-                  <a:lnTo>
-                    <a:pt x="1681421" y="173380"/>
-                  </a:lnTo>
-                  <a:lnTo>
-                    <a:pt x="2615544" y="173380"/>
-                  </a:lnTo>
-                  <a:lnTo>
-                    <a:pt x="2615544" y="161076"/>
-                  </a:lnTo>
-                  <a:lnTo>
-                    <a:pt x="3643080" y="161076"/>
-                  </a:lnTo>
-                  <a:lnTo>
-                    <a:pt x="3643080" y="149237"/>
-                  </a:lnTo>
-                  <a:lnTo>
-                    <a:pt x="3736492" y="149237"/>
-                  </a:lnTo>
-                  <a:lnTo>
-                    <a:pt x="3736492" y="136444"/>
-                  </a:lnTo>
-                  <a:lnTo>
-                    <a:pt x="3829904" y="136444"/>
-                  </a:lnTo>
-                  <a:lnTo>
-                    <a:pt x="3829904" y="110263"/>
-                  </a:lnTo>
-                  <a:lnTo>
-                    <a:pt x="4577203" y="110263"/>
-                  </a:lnTo>
-                  <a:lnTo>
-                    <a:pt x="4577203" y="96960"/>
-                  </a:lnTo>
-                  <a:lnTo>
-                    <a:pt x="5604738" y="96960"/>
-                  </a:lnTo>
-                  <a:lnTo>
-                    <a:pt x="5604738" y="83830"/>
-                  </a:lnTo>
-                  <a:lnTo>
-                    <a:pt x="6165212" y="83830"/>
-                  </a:lnTo>
-                  <a:lnTo>
-                    <a:pt x="6165212" y="70856"/>
-                  </a:lnTo>
-                  <a:lnTo>
-                    <a:pt x="6258624" y="70856"/>
-                  </a:lnTo>
-                  <a:lnTo>
-                    <a:pt x="6258624" y="56939"/>
-                  </a:lnTo>
-                  <a:lnTo>
-                    <a:pt x="6445449" y="56939"/>
-                  </a:lnTo>
-                  <a:lnTo>
-                    <a:pt x="6445449" y="29058"/>
-                  </a:lnTo>
-                  <a:lnTo>
-                    <a:pt x="7005923" y="29058"/>
+                    <a:pt x="93412" y="245347"/>
+                  </a:lnTo>
+                  <a:lnTo>
+                    <a:pt x="93412" y="232694"/>
+                  </a:lnTo>
+                  <a:lnTo>
+                    <a:pt x="186824" y="232694"/>
+                  </a:lnTo>
+                  <a:lnTo>
+                    <a:pt x="186824" y="221409"/>
+                  </a:lnTo>
+                  <a:lnTo>
+                    <a:pt x="373649" y="221409"/>
+                  </a:lnTo>
+                  <a:lnTo>
+                    <a:pt x="373649" y="207756"/>
+                  </a:lnTo>
+                  <a:lnTo>
+                    <a:pt x="1494596" y="207756"/>
+                  </a:lnTo>
+                  <a:lnTo>
+                    <a:pt x="1494596" y="195423"/>
+                  </a:lnTo>
+                  <a:lnTo>
+                    <a:pt x="1588009" y="195423"/>
+                  </a:lnTo>
+                  <a:lnTo>
+                    <a:pt x="1588009" y="183190"/>
+                  </a:lnTo>
+                  <a:lnTo>
+                    <a:pt x="1681421" y="183190"/>
+                  </a:lnTo>
+                  <a:lnTo>
+                    <a:pt x="1681421" y="171775"/>
+                  </a:lnTo>
+                  <a:lnTo>
+                    <a:pt x="2615544" y="171775"/>
+                  </a:lnTo>
+                  <a:lnTo>
+                    <a:pt x="2615544" y="159731"/>
+                  </a:lnTo>
+                  <a:lnTo>
+                    <a:pt x="3643080" y="159731"/>
+                  </a:lnTo>
+                  <a:lnTo>
+                    <a:pt x="3643080" y="148139"/>
+                  </a:lnTo>
+                  <a:lnTo>
+                    <a:pt x="3736492" y="148139"/>
+                  </a:lnTo>
+                  <a:lnTo>
+                    <a:pt x="3736492" y="135605"/>
+                  </a:lnTo>
+                  <a:lnTo>
+                    <a:pt x="3829904" y="135605"/>
+                  </a:lnTo>
+                  <a:lnTo>
+                    <a:pt x="3829904" y="109729"/>
+                  </a:lnTo>
+                  <a:lnTo>
+                    <a:pt x="4577203" y="109729"/>
+                  </a:lnTo>
+                  <a:lnTo>
+                    <a:pt x="4577203" y="96524"/>
+                  </a:lnTo>
+                  <a:lnTo>
+                    <a:pt x="5604738" y="96524"/>
+                  </a:lnTo>
+                  <a:lnTo>
+                    <a:pt x="5604738" y="83468"/>
+                  </a:lnTo>
+                  <a:lnTo>
+                    <a:pt x="6165212" y="83468"/>
+                  </a:lnTo>
+                  <a:lnTo>
+                    <a:pt x="6165212" y="70546"/>
+                  </a:lnTo>
+                  <a:lnTo>
+                    <a:pt x="6258624" y="70546"/>
+                  </a:lnTo>
+                  <a:lnTo>
+                    <a:pt x="6258624" y="56673"/>
+                  </a:lnTo>
+                  <a:lnTo>
+                    <a:pt x="6445449" y="56673"/>
+                  </a:lnTo>
+                  <a:lnTo>
+                    <a:pt x="6445449" y="28834"/>
+                  </a:lnTo>
+                  <a:lnTo>
+                    <a:pt x="7005923" y="28834"/>
                   </a:lnTo>
                   <a:lnTo>
                     <a:pt x="7005923" y="0"/>
@@ -3136,107 +3136,107 @@
           <p:spPr>
             <a:xfrm>
               <a:off x="1260991" y="2861938"/>
-              <a:ext cx="7005923" cy="2486542"/>
+              <a:ext cx="7005923" cy="2496293"/>
             </a:xfrm>
             <a:custGeom>
               <a:avLst/>
               <a:pathLst>
-                <a:path w="7005923" h="2486542">
+                <a:path w="7005923" h="2496293">
                   <a:moveTo>
-                    <a:pt x="0" y="2486542"/>
+                    <a:pt x="0" y="2496293"/>
                   </a:moveTo>
                   <a:lnTo>
-                    <a:pt x="93412" y="2486542"/>
-                  </a:lnTo>
-                  <a:lnTo>
-                    <a:pt x="93412" y="2302314"/>
-                  </a:lnTo>
-                  <a:lnTo>
-                    <a:pt x="186824" y="2302314"/>
-                  </a:lnTo>
-                  <a:lnTo>
-                    <a:pt x="186824" y="2137857"/>
-                  </a:lnTo>
-                  <a:lnTo>
-                    <a:pt x="373649" y="2137857"/>
-                  </a:lnTo>
-                  <a:lnTo>
-                    <a:pt x="373649" y="1946150"/>
-                  </a:lnTo>
-                  <a:lnTo>
-                    <a:pt x="1494596" y="1946150"/>
-                  </a:lnTo>
-                  <a:lnTo>
-                    <a:pt x="1494596" y="1774583"/>
-                  </a:lnTo>
-                  <a:lnTo>
-                    <a:pt x="1588009" y="1774583"/>
-                  </a:lnTo>
-                  <a:lnTo>
-                    <a:pt x="1588009" y="1612920"/>
-                  </a:lnTo>
-                  <a:lnTo>
-                    <a:pt x="1681421" y="1612920"/>
-                  </a:lnTo>
-                  <a:lnTo>
-                    <a:pt x="1681421" y="1466946"/>
-                  </a:lnTo>
-                  <a:lnTo>
-                    <a:pt x="2615544" y="1466946"/>
-                  </a:lnTo>
-                  <a:lnTo>
-                    <a:pt x="2615544" y="1321134"/>
-                  </a:lnTo>
-                  <a:lnTo>
-                    <a:pt x="3643080" y="1321134"/>
-                  </a:lnTo>
-                  <a:lnTo>
-                    <a:pt x="3643080" y="1187746"/>
-                  </a:lnTo>
-                  <a:lnTo>
-                    <a:pt x="3736492" y="1187746"/>
-                  </a:lnTo>
-                  <a:lnTo>
-                    <a:pt x="3736492" y="1051372"/>
-                  </a:lnTo>
-                  <a:lnTo>
-                    <a:pt x="3829904" y="1051372"/>
-                  </a:lnTo>
-                  <a:lnTo>
-                    <a:pt x="3829904" y="796737"/>
-                  </a:lnTo>
-                  <a:lnTo>
-                    <a:pt x="4577203" y="796737"/>
-                  </a:lnTo>
-                  <a:lnTo>
-                    <a:pt x="4577203" y="679053"/>
-                  </a:lnTo>
-                  <a:lnTo>
-                    <a:pt x="5604738" y="679053"/>
-                  </a:lnTo>
-                  <a:lnTo>
-                    <a:pt x="5604738" y="569857"/>
-                  </a:lnTo>
-                  <a:lnTo>
-                    <a:pt x="6165212" y="569857"/>
-                  </a:lnTo>
-                  <a:lnTo>
-                    <a:pt x="6165212" y="468181"/>
-                  </a:lnTo>
-                  <a:lnTo>
-                    <a:pt x="6258624" y="468181"/>
-                  </a:lnTo>
-                  <a:lnTo>
-                    <a:pt x="6258624" y="365360"/>
-                  </a:lnTo>
-                  <a:lnTo>
-                    <a:pt x="6445449" y="365360"/>
-                  </a:lnTo>
-                  <a:lnTo>
-                    <a:pt x="6445449" y="176426"/>
-                  </a:lnTo>
-                  <a:lnTo>
-                    <a:pt x="7005923" y="176426"/>
+                    <a:pt x="93412" y="2496293"/>
+                  </a:lnTo>
+                  <a:lnTo>
+                    <a:pt x="93412" y="2317972"/>
+                  </a:lnTo>
+                  <a:lnTo>
+                    <a:pt x="186824" y="2317972"/>
+                  </a:lnTo>
+                  <a:lnTo>
+                    <a:pt x="186824" y="2157898"/>
+                  </a:lnTo>
+                  <a:lnTo>
+                    <a:pt x="373649" y="2157898"/>
+                  </a:lnTo>
+                  <a:lnTo>
+                    <a:pt x="373649" y="1964486"/>
+                  </a:lnTo>
+                  <a:lnTo>
+                    <a:pt x="1494596" y="1964486"/>
+                  </a:lnTo>
+                  <a:lnTo>
+                    <a:pt x="1494596" y="1792009"/>
+                  </a:lnTo>
+                  <a:lnTo>
+                    <a:pt x="1588009" y="1792009"/>
+                  </a:lnTo>
+                  <a:lnTo>
+                    <a:pt x="1588009" y="1625282"/>
+                  </a:lnTo>
+                  <a:lnTo>
+                    <a:pt x="1681421" y="1625282"/>
+                  </a:lnTo>
+                  <a:lnTo>
+                    <a:pt x="1681421" y="1475422"/>
+                  </a:lnTo>
+                  <a:lnTo>
+                    <a:pt x="2615544" y="1475422"/>
+                  </a:lnTo>
+                  <a:lnTo>
+                    <a:pt x="2615544" y="1324729"/>
+                  </a:lnTo>
+                  <a:lnTo>
+                    <a:pt x="3643080" y="1324729"/>
+                  </a:lnTo>
+                  <a:lnTo>
+                    <a:pt x="3643080" y="1187677"/>
+                  </a:lnTo>
+                  <a:lnTo>
+                    <a:pt x="3736492" y="1187677"/>
+                  </a:lnTo>
+                  <a:lnTo>
+                    <a:pt x="3736492" y="1048597"/>
+                  </a:lnTo>
+                  <a:lnTo>
+                    <a:pt x="3829904" y="1048597"/>
+                  </a:lnTo>
+                  <a:lnTo>
+                    <a:pt x="3829904" y="790032"/>
+                  </a:lnTo>
+                  <a:lnTo>
+                    <a:pt x="4577203" y="790032"/>
+                  </a:lnTo>
+                  <a:lnTo>
+                    <a:pt x="4577203" y="671493"/>
+                  </a:lnTo>
+                  <a:lnTo>
+                    <a:pt x="5604738" y="671493"/>
+                  </a:lnTo>
+                  <a:lnTo>
+                    <a:pt x="5604738" y="562085"/>
+                  </a:lnTo>
+                  <a:lnTo>
+                    <a:pt x="6165212" y="562085"/>
+                  </a:lnTo>
+                  <a:lnTo>
+                    <a:pt x="6165212" y="460659"/>
+                  </a:lnTo>
+                  <a:lnTo>
+                    <a:pt x="6258624" y="460659"/>
+                  </a:lnTo>
+                  <a:lnTo>
+                    <a:pt x="6258624" y="358560"/>
+                  </a:lnTo>
+                  <a:lnTo>
+                    <a:pt x="6445449" y="358560"/>
+                  </a:lnTo>
+                  <a:lnTo>
+                    <a:pt x="6445449" y="171941"/>
+                  </a:lnTo>
+                  <a:lnTo>
+                    <a:pt x="7005923" y="171941"/>
                   </a:lnTo>
                   <a:lnTo>
                     <a:pt x="7005923" y="0"/>
@@ -3314,7 +3314,7 @@
           </p:nvSpPr>
           <p:spPr>
             <a:xfrm>
-              <a:off x="692708" y="4907118"/>
+              <a:off x="692708" y="4917331"/>
               <a:ext cx="155356" cy="80101"/>
             </a:xfrm>
             <a:prstGeom prst="rect">
@@ -3360,7 +3360,7 @@
           </p:nvSpPr>
           <p:spPr>
             <a:xfrm>
-              <a:off x="692708" y="4273865"/>
+              <a:off x="692708" y="4294291"/>
               <a:ext cx="155356" cy="80101"/>
             </a:xfrm>
             <a:prstGeom prst="rect">
@@ -3406,7 +3406,7 @@
           </p:nvSpPr>
           <p:spPr>
             <a:xfrm>
-              <a:off x="692708" y="3640612"/>
+              <a:off x="692708" y="3671252"/>
               <a:ext cx="155356" cy="80101"/>
             </a:xfrm>
             <a:prstGeom prst="rect">
@@ -3452,7 +3452,7 @@
           </p:nvSpPr>
           <p:spPr>
             <a:xfrm>
-              <a:off x="692708" y="3007360"/>
+              <a:off x="692708" y="3048212"/>
               <a:ext cx="155356" cy="80101"/>
             </a:xfrm>
             <a:prstGeom prst="rect">
@@ -3933,7 +3933,7 @@
                   <a:latin typeface="Helvetica"/>
                   <a:cs typeface="Helvetica"/>
                 </a:rPr>
-                <a:t>Discrep &gt;= +25 vs &lt;+25: subHR = 30.52 (95% CI 3.37-276.65), p = 0.002</a:t>
+                <a:t>Discrep &gt;= +25 vs &lt;+25: subHR = 31.78 (95% CI 3.55-284.58), p = 0.002</a:t>
               </a:r>
             </a:p>
           </p:txBody>
